--- a/assets/pptx/catalog-389.pptx
+++ b/assets/pptx/catalog-389.pptx
@@ -3250,7 +3250,7 @@
                 <a:ea typeface="Ebrima"/>
                 <a:cs typeface="Ebrima"/>
               </a:rPr>
-              <a:t>ባንተ አይደለም ወይ (8x)</a:t>
+              <a:t>ባንተ አይደለም ወይ 8x</a:t>
             </a:r>
           </a:p>
         </p:txBody>
@@ -3317,7 +3317,7 @@
                 <a:ea typeface="Ebrima"/>
                 <a:cs typeface="Ebrima"/>
               </a:rPr>
-              <a:t>ሽኩር ጉዌታ ሽኩር - ሽኩር (2x)</a:t>
+              <a:t>ሽኩር ጉዌታ ሽኩር - ሽኩር 2x</a:t>
             </a:r>
           </a:p>
         </p:txBody>
@@ -3698,7 +3698,7 @@
                 <a:ea typeface="Ebrima"/>
                 <a:cs typeface="Ebrima"/>
               </a:rPr>
-              <a:t>ባንተ አይደለም ወይ (8x)</a:t>
+              <a:t>ባንተ አይደለም ወይ 8x</a:t>
             </a:r>
           </a:p>
         </p:txBody>
@@ -4079,7 +4079,7 @@
                 <a:ea typeface="Ebrima"/>
                 <a:cs typeface="Ebrima"/>
               </a:rPr>
-              <a:t>ባንተ አይደለም ወይ (8x)</a:t>
+              <a:t>ባንተ አይደለም ወይ 8x</a:t>
             </a:r>
           </a:p>
         </p:txBody>
